--- a/open_claw/presentation/OpenClaw_Presentation.pptx
+++ b/open_claw/presentation/OpenClaw_Presentation.pptx
@@ -1408,18 +1408,18 @@
             <a:r>
               <a:rPr lang="en-US" dirty="0"/>
               <a:t>SLIDE 12 — AGENT RUNTIME &amp; SKILLS
-Thoi gian: ~90 giay
-Diem chinh:
-- Agent la don vi co ban — moi agent co ten rieng, model rieng, skills rieng
-- Dual-loop: outer loop xu ly tin nhan, inner loop cho tool calls
-- Context Engine: gom lich su hoi thoai + memory search + system prompt
-- Skills duoc inject vao LLM nhu "tools" (OpenAI function calling format)
-- Khi co action nguy hiem (delete, send email, shell), sandbox bat buoc approval
-Cau hoi du kien:
-Q: "LLM co the goi nhieu skills mot luc khong?"
-A: "Co, agent ho tro parallel tool execution — LLM tra ve nhieu tool_calls cung luc, executor chay song song roi tong hop ket qua."
-Q: "Memory search hoat dong nhu the nao?"
-A: "LanceDB tao vector embedding cho moi tin nhan, Context Engine lay top-K related memories truoc khi gui cho LLM."</a:t>
+Thời gian: ~90 giây
+Điểm chính:
+- Agent là đơn vị cơ bản — mỗi agent có tên riêng, model riêng, skills riêng
+- Dual-loop: outer loop xử lý tin nhắn, inner loop cho tool calls
+- Context Engine: gồm lịch sử hội thoại + memory search + system prompt
+- Skills được inject vào LLM như "tools" (OpenAI function calling format)
+- Khi có action nguy hiểm (delete, send email, shell), sandbox bắt buộc approval
+Câu hỏi dự kiến:
+Q: "LLM có thể gọi nhiều skills một lúc không?"
+A: "Có, agent hỗ trợ parallel tool execution — LLM trả về nhiều tool_calls cùng lúc, executor chạy song song rồi tổng hợp kết quả."
+Q: "Memory search hoạt động như thế nào?"
+A: "LanceDB tạo vector embedding cho mỗi tin nhắn, Context Engine lấy top-K related memories trước khi gửi cho LLM."</a:t>
             </a:r>
             <a:endParaRPr lang="en-US" dirty="0"/>
           </a:p>
@@ -1508,18 +1508,18 @@
             <a:r>
               <a:rPr lang="en-US" dirty="0"/>
               <a:t>SLIDE 13 — 52 BUILT-IN SKILLS
-Thoi gian: ~90 giay
-Diem chinh:
-- 52 skills chia 6 nhom, cover tat ca use cases pho bien
-- NGUY HIEM — can approval: run_bash, run_python, delete_file, send_email, create_pr
-- AN TOAN — khong can approval: read_file, web_fetch, memory_recall, git_status
-- ClawHub cho phep cai them skills tu cong dong (nhu npm packages)
-Luu y cho nguoi dung:
-- Sandbox mode: moi lan skill de thay doi trang thai (ghi file, gui tin) se hien popup xac nhan
-- Co the whitelist skills cho agent cu the trong config
-Cau hoi du kien:
-Q: "Co the viet them skill khong?"
-A: "Co, qua Plugin SDK — viet TypeScript, publish len ClawHub, cai voi mot lenh."</a:t>
+Thời gian: ~90 giây
+Điểm chính:
+- 52 skills chia 6 nhóm, cover tất cả use cases phổ biến
+- NGUY HIỂM — cần approval: run_bash, run_python, delete_file, send_email, create_pr
+- AN TOÀN — không cần approval: read_file, web_fetch, memory_recall, git_status
+- ClawHub cho phép cài thêm skills từ cộng đồng (như npm packages)
+Lưu ý cho người dùng:
+- Sandbox mode: mỗi lần skill để thay đổi trạng thái (ghi file, gửi tin) sẽ hiện popup xác nhận
+- Có thể whitelist skills cho agent cụ thể trong config
+Câu hỏi dự kiến:
+Q: "Có thể viết thêm skill không?"
+A: "Có, qua Plugin SDK — viết TypeScript, publish lên ClawHub, cài với một lệnh."</a:t>
             </a:r>
             <a:endParaRPr lang="en-US" dirty="0"/>
           </a:p>
@@ -1608,20 +1608,20 @@
             <a:r>
               <a:rPr lang="en-US" dirty="0"/>
               <a:t>SLIDE 14 — PLUGIN SDK &amp; CLAWHUB
-Thoi gian: ~2 phut
-Diem chinh:
-- Plugin interface chi 4 truong — don gian nhung manh
-- tools: them skills moi cho agent (vi du: goi API rieng)
-- channels: tich hop them kenh nhan tin (vi du: Zalo OA, Viber)
-- providers: them LLM khac (vi du: Grok, Amazon Bedrock)
-- routes: them HTTP endpoints (vi du: webhook receiver)
-- ClawHub hoat dong nhu npm/PyPI cho OpenClaw plugins
-- MCP (Model Context Protocol) cua Anthropic duoc ho tro qua mcporter bridge
-Cau hoi du kien:
-Q: "MCP la gi?"
-A: "Model Context Protocol cua Anthropic — chuan thong nhat cho LLM tu truy cap external tools. OpenClaw ket noi voi MCP ecosystem qua mcporter, nen co the dung bat ky MCP server nao."
-Q: "Ai co the publish plugin len ClawHub?"
-A: "Bat ky ai — can dang ky, pass security review co ban, roi publish. Tuong tu npm public registry."</a:t>
+Thời gian: ~2 phút
+Điểm chính:
+- Plugin interface chỉ 4 trường — đơn giản nhưng mạnh
+- tools: thêm skills mới cho agent (ví dụ: gọi API riêng)
+- channels: tích hợp thêm kênh nhắn tin (ví dụ: Zalo OA, Viber)
+- providers: thêm LLM khác (ví dụ: Grok, Amazon Bedrock)
+- routes: thêm HTTP endpoints (ví dụ: webhook receiver)
+- ClawHub hoạt động như npm/PyPI cho OpenClaw plugins
+- MCP (Model Context Protocol) của Anthropic được hỗ trợ qua mcporter bridge
+Câu hỏi dự kiến:
+Q: "MCP là gì?"
+A: "Model Context Protocol của Anthropic — chuẩn thống nhất cho LLM tự truy cập external tools. OpenClaw kết nối với MCP ecosystem qua mcporter, nên có thể dùng bất kỳ MCP server nào."
+Q: "Ai có thể publish plugin lên ClawHub?"
+A: "Bất kỳ ai — cần đăng ký, pass security review cơ bản, rồi publish. Tương tự npm public registry."</a:t>
             </a:r>
             <a:endParaRPr lang="en-US" dirty="0"/>
           </a:p>
@@ -1709,20 +1709,20 @@
           <a:p>
             <a:r>
               <a:rPr lang="en-US" dirty="0"/>
-              <a:t>SLIDE 15 — UNG DUNG MOBILE
-Thoi gian: ~90 giay
-Diem chinh:
-- Ba nen tang native: macOS (Swift), iOS (Swift + TestFlight), Android (Kotlin)
-- ACP (Agent Communication Protocol) la giao thuc noi bo de mobile app noi voi gateway
-- iOS v2026.3.11 co redesign Home Canvas — giao dien moi dep hon, responsive
-- Android co SMS Intercept: agent co the doc va tra loi SMS (can quyen)
-- Talk Mode tren Android: roi tay hoan toan, noi chuyen nhu Siri
-Luu y:
-- iOS hien qua TestFlight (beta), chua co tren App Store chinh thuc
-- ACP ho tro 3 kieu ket noi: Local WiFi (nhanh nhat), Tailscale VPN (an toan), Relay (luon on)
-Cau hoi du kien:
-Q: "Co the dung tren Android khong can cai agent tren server khong?"
-A: "Co — Android Node cho phep chay agent ngay tren thiet bi Android (offline), khong can server rieng."</a:t>
+              <a:t>SLIDE 15 — ỨNG DỤNG MOBILE
+Thời gian: ~90 giây
+Điểm chính:
+- Ba nền tảng native: macOS (Swift), iOS (Swift + TestFlight), Android (Kotlin)
+- ACP (Agent Communication Protocol) là giao thức nội bộ để mobile app nối với gateway
+- iOS v2026.3.11 có redesign Home Canvas — giao diện mới đẹp hơn, responsive
+- Android có SMS Intercept: agent có thể đọc và trả lời SMS (cần quyền)
+- Talk Mode trên Android: rảnh tay hoàn toàn, nói chuyện như Siri
+Lưu ý:
+- iOS hiện qua TestFlight (beta), chưa có trên App Store chính thức
+- ACP hỗ trợ 3 kiểu kết nối: Local WiFi (nhanh nhất), Tailscale VPN (an toàn), Relay (luôn ổn)
+Câu hỏi dự kiến:
+Q: "Có thể dùng trên Android không cần cài agent trên server không?"
+A: "Có — Android Node cho phép chạy agent ngay trên thiết bị Android (offline), không cần server riêng."</a:t>
             </a:r>
             <a:endParaRPr lang="en-US" dirty="0"/>
           </a:p>
@@ -1810,23 +1810,23 @@
           <a:p>
             <a:r>
               <a:rPr lang="en-US" dirty="0"/>
-              <a:t>SLIDE 16 — SO SANH &amp; BENCHMARK
-Thoi gian: ~2 phut
-Diem chinh:
-- OpenClaw thang tuyet doi ve: Privacy (9), Channels (9), LLM Flexibility (9)
-- OpenClaw thua ve: Ease-of-Use (3) — can terminal, config files
-- ChatGPT/Claude.ai tot hon cho: nguoi dung pho thong, khong quen tech
+              <a:t>SLIDE 16 — SO SÁNH &amp; BENCHMARK
+Thời gian: ~2 phút
+Điểm chính:
+- OpenClaw thắng tuyệt đối về: Privacy (9), Channels (9), LLM Flexibility (9)
+- OpenClaw thua về: Ease-of-Use (3) — cần terminal, config files
+- ChatGPT/Claude.ai tốt hơn cho: người dùng phổ thông, không quen tech
 Sweet spot audience:
-- Developer, DevOps, Power User co kien thuc tech
-- Can privacy cao (y te, luat, tai chinh)
-- Su dung Zalo cho cong viec
-KHONG dung OpenClaw khi:
-- Chi can chat don gian, khong code/automation
-- Khong quen terminal/Node.js
-- Can ket qua ngay (setup mat ~30 phut)
-Cau hoi du kien:
-Q: "ChatGPT co Channels rieng, tai sao diem thap?"
-A: "ChatGPT co web va mobile app, nhung KHONG co Telegram bot API, khong co Zalo, khong tich hop vao Discord/Slack nhu OpenClaw. 2 diem la chi la web + mobile."</a:t>
+- Developer, DevOps, Power User có kiến thức tech
+- Cần privacy cao (y tế, luật, tài chính)
+- Sử dụng Zalo cho công việc
+KHÔNG dùng OpenClaw khi:
+- Chỉ cần chat đơn giản, không code/automation
+- Không quen terminal/Node.js
+- Cần kết quả ngay (setup mất ~30 phút)
+Câu hỏi dự kiến:
+Q: "ChatGPT có Channels riêng, tại sao điểm thấp?"
+A: "ChatGPT có web và mobile app, nhưng KHÔNG có Telegram bot API, không có Zalo, không tích hợp vào Discord/Slack như OpenClaw. 2 điểm là chỉ là web + mobile."</a:t>
             </a:r>
             <a:endParaRPr lang="en-US" dirty="0"/>
           </a:p>
@@ -1915,20 +1915,20 @@
             <a:r>
               <a:rPr lang="en-US" dirty="0"/>
               <a:t>SLIDE 17 — DESIGN PATTERNS
-Thoi gian: ~2 phut
-Diem chinh:
-- 6 patterns nay la xuong song cua OpenClaw architecture
-- Gateway Hub: giam tu N*M ket noi xuong N+M (complexity linear thay vi quadratic)
-- Adapter Pattern: them Zalo chi can viet TelegramAdapter moi, khong sua gi het
-- Strategy Pattern: users co the doi LLM chi bang 1 dong config, khong restart
-Anti-patterns can tranh (danh cho developers dang hoc):
-- "God Agent": cho agent lam tat ca — nen chia nho subagents theo domain
-- "Skip Approval": bo qua cong approval de nhanh hon — nguy hiem cho production
-- "Trust AI Output": neu LLM tra ve code, phai review truoc khi exec
-- "Hardcode LLM": viet code gia su luon dung GPT-4 — dung LLMFactory thay
-Cau hoi du kien:
-Q: "Failover Chain co tu dong khong hay phai config?"
-A: "Tu dong theo thu tu trong config: primary → fallback1 → fallback2. Co timeout per attempt va jitter delay."</a:t>
+Thời gian: ~2 phút
+Điểm chính:
+- 6 patterns này là xương sống của OpenClaw architecture
+- Gateway Hub: giảm từ N*M kết nối xuống N+M (complexity linear thay vì quadratic)
+- Adapter Pattern: thêm Zalo chỉ cần viết TelegramAdapter mới, không sửa gì hết
+- Strategy Pattern: users có thể đổi LLM chỉ bằng 1 dòng config, không restart
+Anti-patterns cần tránh (dành cho developers đang học):
+- "God Agent": cho agent làm tất cả — nên chia nhỏ subagents theo domain
+- "Skip Approval": bỏ qua cổng approval để nhanh hơn — nguy hiểm cho production
+- "Trust AI Output": nếu LLM trả về code, phải review trước khi exec
+- "Hardcode LLM": viết code giả sử luôn dùng GPT-4 — dùng LLMFactory thay
+Câu hỏi dự kiến:
+Q: "Failover Chain có tự động không hay phải config?"
+A: "Tự động theo thứ tự trong config: primary → fallback1 → fallback2. Có timeout per attempt và jitter delay."</a:t>
             </a:r>
             <a:endParaRPr lang="en-US" dirty="0"/>
           </a:p>
@@ -2017,21 +2017,21 @@
             <a:r>
               <a:rPr lang="en-US" dirty="0"/>
               <a:t>SLIDE 18 — ROADMAP
-Thoi gian: ~90 giay
-Diem chinh:
-- v2026.3.11 la phien ban ky thuat lon nhat trong 2 nam
-- 7 CVE da va them 7 dang fix — security-first mindset
-- iOS App Store la muc tieu chinh cua Q2 2026
-- WebAssembly sandbox se thay the Node.js sandbox hien tai — an toan hon, nhanh hon
-Su on dinh tai chinh:
-- 22,100+ GitHub stars — du lon de thu hut sponsors
-- OpenAI va Vercel dang tai tro → du tien de phat trien full-time
-- MIT license: users co the dung thuong mai mien phi
-Cau hoi du kien:
-Q: "Bao gio co tren iOS App Store?"
-A: "Target Q2 2026 — dang qua review Apple. Hien tai co qua TestFlight (beta public)."
-Q: "Enterprise co on premise khong?"
-A: "Co — OpenClaw da co the deploy on-prem. Enterprise tier them SSO (SAML), RBAC, audit log va support contract."</a:t>
+Thời gian: ~90 giây
+Điểm chính:
+- v2026.3.11 là phiên bản kỹ thuật lớn nhất trong 2 năm
+- 7 CVE đã vá thêm 7 đang fix — security-first mindset
+- iOS App Store là mục tiêu chính của Q2 2026
+- WebAssembly sandbox sẽ thay thế Node.js sandbox hiện tại — an toàn hơn, nhanh hơn
+Sự ổn định tài chính:
+- 22,100+ GitHub stars — đủ lớn để thu hút sponsors
+- OpenAI và Vercel đang tài trợ → đủ tiền để phát triển full-time
+- MIT license: users có thể dùng thương mại miễn phí
+Câu hỏi dự kiến:
+Q: "Bao giờ có trên iOS App Store?"
+A: "Target Q2 2026 — đang qua review Apple. Hiện tại có qua TestFlight (beta public)."
+Q: "Enterprise có on premise không?"
+A: "Có — OpenClaw đã có thể deploy on-prem. Enterprise tier thêm SSO (SAML), RBAC, audit log và support contract."</a:t>
             </a:r>
             <a:endParaRPr lang="en-US" dirty="0"/>
           </a:p>
@@ -2120,23 +2120,23 @@
             <a:r>
               <a:rPr lang="en-US" dirty="0"/>
               <a:t>SLIDE 19 — QUICK START
-Thoi gian: ~90 giay
-Diem chinh:
-- 3 lenh la du de chay: install → onboard → doctor
-- Onboard wizard tu dong hoi: chon kenh, nhap API key, chon LLM
-- openclaw doctor kiem tra: daemon running, auth ok, kenh ket noi, LLM ok
-- Config JSON rat don gian — port, auth mode, model, plugins
-Yeu cau he thong:
-- Node.js &gt;= 22 (quan trong — khong chay tren Node 18/20)
-- 512MB RAM toi thieu (khong tinh LLM local)
-- Cho Ollama local: VRAM tuy model (llama3.3:70b can ~40GB VRAM)
-3 use cases de demo:
+Thời gian: ~90 giây
+Điểm chính:
+- 3 lệnh là đủ để chạy: install → onboard → doctor
+- Onboard wizard tự động hỏi: chọn kênh, nhập API key, chọn LLM
+- openclaw doctor kiểm tra: daemon running, auth ok, kênh kết nối, LLM ok
+- Config JSON rất đơn giản — port, auth mode, model, plugins
+Yêu cầu hệ thống:
+- Node.js &gt;= 22 (quan trọng — không chạy trên Node 18/20)
+- 512MB RAM tối thiểu (không tính LLM local)
+- Cho Ollama local: VRAM tùy model (llama3.3:70b cần ~40GB VRAM)
+3 use cases để demo:
 1. DevOps automation: cron + Telegram alert + run_bash
 2. Discord bot cho game community (CCN2 use case!)
-3. Offline AI voi Ollama + Zalo (khong cloud, khong phi)
-Cau hoi du kien:
-Q: "Co the dung nhieu agents cung luc khong?"
-A: "Co — config 'agents' la object, co the co main, coder, devops, moi agent co model va skills rieng."</a:t>
+3. Offline AI với Ollama + Zalo (không cloud, không phí)
+Câu hỏi dự kiến:
+Q: "Có thể dùng nhiều agents cùng lúc không?"
+A: "Có — config 'agents' là object, có thể có main, coder, devops, mỗi agent có model và skills riêng."</a:t>
             </a:r>
             <a:endParaRPr lang="en-US" dirty="0"/>
           </a:p>
@@ -2321,22 +2321,22 @@
           <a:p>
             <a:r>
               <a:rPr lang="en-US" dirty="0"/>
-              <a:t>SLIDE 20 — USE CASES THUC TE
-Thoi gian: ~2 phut
-Diem chinh:
-- 3 use cases thuc te, moi cai co ROI ro rang
-- Use case 2 (Game Community Bot) LIEN QUAN TRUC TIEP den CCN2 project!
-  → CCN2 la board game, co the dung OpenClaw lam Discord bot cho game
-  → Claude Haiku re nhat ($0.25/M tokens) — phu hop cho game community (nhieu query, low budget)
-  → Strict sandbox: bot chi doc (read ranking, hoi rules), KHONG ghi
-Nhan manh cho khán gia developer:
-- Use case 1: neu lam DevOps/SRE, tiet kiem 2-3 gio/ngay tu dong hoa bao cao
-- Use case 3: privacy use case (bac si, luat su, ngan hang) — data khong bao gio roi may
-Demo goi y:
-- Neu co thoi gian, demo live: "openclaw agent --message 'Xin chao, ban la ai?'"
-Cau hoi du kien:
-Q: "Chi phi voi Claude Haiku la bao nhieu?"
-A: "$0.25 per million input tokens — voi game community bot ~1000 queries/ngay, chi phi chi ~$0.01/ngay."</a:t>
+              <a:t>SLIDE 20 — USE CASES THỰC TẾ
+Thời gian: ~2 phút
+Điểm chính:
+- 3 use cases thực tế, mỗi cái có ROI rõ ràng
+- Use case 2 (Game Community Bot) LIÊN QUAN TRỰC TIẾP đến CCN2 project!
+  → CCN2 là board game, có thể dùng OpenClaw làm Discord bot cho game
+  → Claude Haiku rẻ nhất ($0.25/M tokens) — phù hợp cho game community (nhiều query, low budget)
+  → Strict sandbox: bot chỉ đọc (read ranking, hỏi rules), KHÔNG ghi
+Nhấn mạnh cho khán giả developer:
+- Use case 1: nếu làm DevOps/SRE, tiết kiệm 2-3 giờ/ngày tự động hóa báo cáo
+- Use case 3: privacy use case (bác sĩ, luật sư, ngân hàng) — data không bao giờ rời máy
+Demo gợi ý:
+- Nếu có thời gian, demo live: "openclaw agent --message 'Xin chào, bạn là ai?'"
+Câu hỏi dự kiến:
+Q: "Chi phí với Claude Haiku là bao nhiêu?"
+A: "$0.25 per million input tokens — với game community bot ~1000 queries/ngày, chi phí chỉ ~$0.01/ngày."</a:t>
             </a:r>
             <a:endParaRPr lang="en-US" dirty="0"/>
           </a:p>
@@ -2425,21 +2425,21 @@
             <a:r>
               <a:rPr lang="en-US" dirty="0"/>
               <a:t>SLIDE 21 — DATA FLOW
-Thoi gian: ~2 phut
-Diem chinh:
-- Vi du cu the: hoi thoi tiet qua Telegram → tra loi trong ~800ms
-- Luong di qua 10 buoc nhung hau het &lt; 10ms moi buoc
-- Approval KHONG can vi weather la read-only skill (chi web_fetch, khong ghi gi)
-- Streaming: response hien ra theo tung token, user khong phai doi full
-Nhan manh:
-- Server-authoritative: agent quyet dinh co thuc thi skill hay khong (khong phai LLM)
-- LLM chi "de nghi" tool_call, con agent runtime validate truoc khi chay
-- Context Engine giu lich su 10 tin nhan gan nhat + memory search
-Cau hoi du kien:
-Q: "Neu weather API het han, agent lam gi?"
-A: "Failover Chain: thu provider 1 → fail → thu provider 2 → fail → bao loi thân thien cho user, khong crash."
-Q: "800ms co qua cham khong?"
-A: "Phu thuoc network va LLM. Voi Haiku local proxy: ~200ms. Voi Claude.ai API tu Viet Nam: ~1-2s. Streaming an buffer tot hon cai cam giac."</a:t>
+Thời gian: ~2 phút
+Điểm chính:
+- Ví dụ cụ thể: hỏi thời tiết qua Telegram → trả lời trong ~800ms
+- Luồng đi qua 10 bước nhưng hầu hết &lt; 10ms mỗi bước
+- Approval KHÔNG cần vì weather là read-only skill (chỉ web_fetch, không ghi gì)
+- Streaming: response hiện ra theo từng token, user không phải đợi full
+Nhấn mạnh:
+- Server-authoritative: agent quyết định có thực thi skill hay không (không phải LLM)
+- LLM chỉ "đề nghị" tool_call, còn agent runtime validate trước khi chạy
+- Context Engine giữ lịch sử 10 tin nhắn gần nhất + memory search
+Câu hỏi dự kiến:
+Q: "Nếu weather API hết hạn, agent làm gì?"
+A: "Failover Chain: thử provider 1 → fail → thử provider 2 → fail → báo lỗi thân thiện cho user, không crash."
+Q: "800ms có quá chậm không?"
+A: "Phụ thuộc network và LLM. Với Haiku local proxy: ~200ms. Với Claude.ai API từ Việt Nam: ~1-2s. Streaming ẩn buffer tốt hơn cái cảm giác."</a:t>
             </a:r>
             <a:endParaRPr lang="en-US" dirty="0"/>
           </a:p>
@@ -2527,24 +2527,24 @@
           <a:p>
             <a:r>
               <a:rPr lang="en-US" dirty="0"/>
-              <a:t>SLIDE 22 — KET LUAN
-Thoi gian: ~2 phut + Q&amp;A
-Ba diem chinh can nho:
-1. GATEWAY: OpenClaw la lop middleware giua LLM va kenh nhan tin — khong phai chatbot
-2. POWER: Danh cho developer/DevOps — co the chay shell script, browser, git tu nhien lieu chat
-3. PRIVACY: MIT license + self-hosted = zero vendor lock-in, data o lai may ban
-Keu goi hanh dong:
-- "Chung ta co the thu cai dat ngay tren laptop trong 5 phut, ai muon thu sau buoi hoc?"
-- "Star repo Pi-Mono tren GitHub de ho tro team — hien co 22,100+ stars"
-- "Neu ban dang lam Discord bot cho CCN2 game, day la giai phap phu hop nhat"
-Phan Q&amp;A goi y:
-- De mo cua: "Cac ban co cau hoi gi khong? Dac biet ve phan so sanh voi ChatGPT hay ve viec tich hop vao du an cu the?"
-- Neu khong co cau hoi: demo live 2 phut (cai dat + goi agent)
-Cau hoi du kien:
-Q: "Co documentation tieng Viet khong?"
-A: "Hien tai docs chu yeu tieng Anh, nhung community co mot so guides tieng Viet. OpenClaw GUI (Claw Desktop) co tieng Viet."
-Q: "Security co audit chua?"
-A: "Community audit, khong phai formal pentest. 14 CVE da fix ke tu 2024. Cho enterprise, recommend tu chay pentest truoc deploy."</a:t>
+              <a:t>SLIDE 22 — KẾT LUẬN
+Thời gian: ~2 phút + Q&amp;A
+Ba điểm chính cần nhớ:
+1. GATEWAY: OpenClaw là lớp middleware giữa LLM và kênh nhắn tin — không phải chatbot
+2. POWER: Dành cho developer/DevOps — có thể chạy shell script, browser, git từ nhiên liệu chat
+3. PRIVACY: MIT license + self-hosted = zero vendor lock-in, data ở lại máy bạn
+Kêu gọi hành động:
+- "Chúng ta có thể thử cài đặt ngay trên laptop trong 5 phút, ai muốn thử sau buổi học?"
+- "Star repo Pi-Mono trên GitHub để hỗ trợ team — hiện có 22,100+ stars"
+- "Nếu bạn đang làm Discord bot cho CCN2 game, đây là giải pháp phù hợp nhất"
+Phần Q&amp;A gợi ý:
+- Để mở cửa: "Các bạn có câu hỏi gì không? Đặc biệt về phần so sánh với ChatGPT hay về việc tích hợp vào dự án cụ thể?"
+- Nếu không có câu hỏi: demo live 2 phút (cài đặt + gọi agent)
+Câu hỏi dự kiến:
+Q: "Có documentation tiếng Việt không?"
+A: "Hiện tại docs chủ yếu tiếng Anh, nhưng community có một số guides tiếng Việt. OpenClaw GUI (Claw Desktop) có tiếng Việt."
+Q: "Security có audit chưa?"
+A: "Community audit, không phải formal pentest. 14 CVE đã fix kể từ 2024. Cho enterprise, recommend tự chạy pentest trước deploy."</a:t>
             </a:r>
             <a:endParaRPr lang="en-US" dirty="0"/>
           </a:p>
@@ -8730,7 +8730,7 @@
                 <a:ea typeface="Calibri" pitchFamily="34" charset="-122"/>
                 <a:cs typeface="Calibri" pitchFamily="34" charset="-120"/>
               </a:rPr>
-              <a:t>Luong xu ly</a:t>
+              <a:t>Luồng xử lý</a:t>
             </a:r>
             <a:endParaRPr lang="en-US" sz="1400" dirty="0"/>
           </a:p>
@@ -8803,7 +8803,7 @@
                 <a:ea typeface="Calibri" pitchFamily="34" charset="-122"/>
                 <a:cs typeface="Calibri" pitchFamily="34" charset="-120"/>
               </a:rPr>
-              <a:t>Nhan tin</a:t>
+              <a:t>Nhận tin</a:t>
             </a:r>
             <a:endParaRPr lang="en-US" sz="1200" dirty="0"/>
           </a:p>
@@ -9239,7 +9239,7 @@
                 <a:ea typeface="Calibri" pitchFamily="34" charset="-122"/>
                 <a:cs typeface="Calibri" pitchFamily="34" charset="-120"/>
               </a:rPr>
-              <a:t>LLM Suy nghi</a:t>
+              <a:t>LLM Suy nghĩ</a:t>
             </a:r>
             <a:endParaRPr lang="en-US" sz="1200" dirty="0"/>
           </a:p>
@@ -9566,7 +9566,7 @@
                 <a:ea typeface="Calibri" pitchFamily="34" charset="-122"/>
                 <a:cs typeface="Calibri" pitchFamily="34" charset="-120"/>
               </a:rPr>
-              <a:t>Luu context</a:t>
+              <a:t>Lưu context</a:t>
             </a:r>
             <a:endParaRPr lang="en-US" sz="1200" dirty="0"/>
           </a:p>
@@ -9662,7 +9662,7 @@
                 <a:ea typeface="Calibri" pitchFamily="34" charset="-122"/>
                 <a:cs typeface="Calibri" pitchFamily="34" charset="-120"/>
               </a:rPr>
-              <a:t>52 Built-in Skills — He Thong Ky Nang</a:t>
+              <a:t>52 Built-in Skills — Hệ Thống Kỹ Năng</a:t>
             </a:r>
             <a:endParaRPr lang="en-US" sz="2800" dirty="0"/>
           </a:p>
@@ -12563,7 +12563,7 @@
                 <a:ea typeface="Calibri" pitchFamily="34" charset="-122"/>
                 <a:cs typeface="Calibri" pitchFamily="34" charset="-120"/>
               </a:rPr>
-              <a:t>4 loai Extension:</a:t>
+              <a:t>4 loại Extension:</a:t>
             </a:r>
             <a:endParaRPr lang="en-US" sz="1300" dirty="0"/>
           </a:p>
@@ -12577,7 +12577,7 @@
         </p:nvSpPr>
         <p:spPr>
           <a:xfrm>
-            <a:off x="5760720" y="1188720"/>
+            <a:off x="5760720" y="1170432"/>
             <a:ext cx="2926080" cy="475488"/>
           </a:xfrm>
           <a:prstGeom prst="roundRect">
@@ -12611,7 +12611,7 @@
         </p:nvSpPr>
         <p:spPr>
           <a:xfrm>
-            <a:off x="5760720" y="1188720"/>
+            <a:off x="5760720" y="1170432"/>
             <a:ext cx="2926080" cy="256032"/>
           </a:xfrm>
           <a:prstGeom prst="rect">
@@ -12650,7 +12650,7 @@
         </p:nvSpPr>
         <p:spPr>
           <a:xfrm>
-            <a:off x="5760720" y="1426464"/>
+            <a:off x="5760720" y="1408176"/>
             <a:ext cx="2926080" cy="219456"/>
           </a:xfrm>
           <a:prstGeom prst="rect">
@@ -12675,7 +12675,7 @@
                 <a:ea typeface="Calibri" pitchFamily="34" charset="-122"/>
                 <a:cs typeface="Calibri" pitchFamily="34" charset="-120"/>
               </a:rPr>
-              <a:t>Them kenh nhan tin</a:t>
+              <a:t>Thêm kênh nhắn tin</a:t>
             </a:r>
             <a:endParaRPr lang="en-US" sz="1000" dirty="0"/>
           </a:p>
@@ -12689,7 +12689,7 @@
         </p:nvSpPr>
         <p:spPr>
           <a:xfrm>
-            <a:off x="5760720" y="1755648"/>
+            <a:off x="5760720" y="1700784"/>
             <a:ext cx="2926080" cy="475488"/>
           </a:xfrm>
           <a:prstGeom prst="roundRect">
@@ -12723,7 +12723,7 @@
         </p:nvSpPr>
         <p:spPr>
           <a:xfrm>
-            <a:off x="5760720" y="1755648"/>
+            <a:off x="5760720" y="1700784"/>
             <a:ext cx="2926080" cy="256032"/>
           </a:xfrm>
           <a:prstGeom prst="rect">
@@ -12762,7 +12762,7 @@
         </p:nvSpPr>
         <p:spPr>
           <a:xfrm>
-            <a:off x="5760720" y="1993392"/>
+            <a:off x="5760720" y="1938528"/>
             <a:ext cx="2926080" cy="219456"/>
           </a:xfrm>
           <a:prstGeom prst="rect">
@@ -12801,7 +12801,7 @@
         </p:nvSpPr>
         <p:spPr>
           <a:xfrm>
-            <a:off x="5760720" y="2322576"/>
+            <a:off x="5760720" y="2231136"/>
             <a:ext cx="2926080" cy="475488"/>
           </a:xfrm>
           <a:prstGeom prst="roundRect">
@@ -12835,7 +12835,7 @@
         </p:nvSpPr>
         <p:spPr>
           <a:xfrm>
-            <a:off x="5760720" y="2322576"/>
+            <a:off x="5760720" y="2231136"/>
             <a:ext cx="2926080" cy="256032"/>
           </a:xfrm>
           <a:prstGeom prst="rect">
@@ -12874,7 +12874,7 @@
         </p:nvSpPr>
         <p:spPr>
           <a:xfrm>
-            <a:off x="5760720" y="2560320"/>
+            <a:off x="5760720" y="2468880"/>
             <a:ext cx="2926080" cy="219456"/>
           </a:xfrm>
           <a:prstGeom prst="rect">
@@ -12913,7 +12913,7 @@
         </p:nvSpPr>
         <p:spPr>
           <a:xfrm>
-            <a:off x="5760720" y="2889504"/>
+            <a:off x="5760720" y="2761488"/>
             <a:ext cx="2926080" cy="475488"/>
           </a:xfrm>
           <a:prstGeom prst="roundRect">
@@ -12947,7 +12947,7 @@
         </p:nvSpPr>
         <p:spPr>
           <a:xfrm>
-            <a:off x="5760720" y="2889504"/>
+            <a:off x="5760720" y="2761488"/>
             <a:ext cx="2926080" cy="256032"/>
           </a:xfrm>
           <a:prstGeom prst="rect">
@@ -12986,7 +12986,7 @@
         </p:nvSpPr>
         <p:spPr>
           <a:xfrm>
-            <a:off x="5760720" y="3127248"/>
+            <a:off x="5760720" y="2999232"/>
             <a:ext cx="2926080" cy="219456"/>
           </a:xfrm>
           <a:prstGeom prst="rect">
@@ -13025,7 +13025,7 @@
         </p:nvSpPr>
         <p:spPr>
           <a:xfrm>
-            <a:off x="457200" y="2788920"/>
+            <a:off x="457200" y="3337560"/>
             <a:ext cx="8229600" cy="960120"/>
           </a:xfrm>
           <a:prstGeom prst="roundRect">
@@ -13052,7 +13052,7 @@
         </p:nvSpPr>
         <p:spPr>
           <a:xfrm>
-            <a:off x="640080" y="2834640"/>
+            <a:off x="640080" y="3383280"/>
             <a:ext cx="3657600" cy="320040"/>
           </a:xfrm>
           <a:prstGeom prst="rect">
@@ -13077,7 +13077,7 @@
                 <a:ea typeface="Calibri" pitchFamily="34" charset="-122"/>
                 <a:cs typeface="Calibri" pitchFamily="34" charset="-120"/>
               </a:rPr>
-              <a:t>ClawHub — Registry cong dong</a:t>
+              <a:t>ClawHub — Registry cộng đồng</a:t>
             </a:r>
             <a:endParaRPr lang="en-US" sz="1300" dirty="0"/>
           </a:p>
@@ -13091,7 +13091,7 @@
         </p:nvSpPr>
         <p:spPr>
           <a:xfrm>
-            <a:off x="640080" y="3154680"/>
+            <a:off x="640080" y="3703320"/>
             <a:ext cx="3657600" cy="274320"/>
           </a:xfrm>
           <a:prstGeom prst="rect">
@@ -13116,7 +13116,7 @@
                 <a:ea typeface="Calibri" pitchFamily="34" charset="-122"/>
                 <a:cs typeface="Calibri" pitchFamily="34" charset="-120"/>
               </a:rPr>
-              <a:t>Phat hien, cai dat va chia se plugins:</a:t>
+              <a:t>Phát hiện, cài đặt và chia sẻ plugins:</a:t>
             </a:r>
             <a:endParaRPr lang="en-US" sz="1100" dirty="0"/>
           </a:p>
@@ -13130,7 +13130,7 @@
         </p:nvSpPr>
         <p:spPr>
           <a:xfrm>
-            <a:off x="4480560" y="2880360"/>
+            <a:off x="4480560" y="3429000"/>
             <a:ext cx="4023360" cy="365760"/>
           </a:xfrm>
           <a:prstGeom prst="roundRect">
@@ -13157,7 +13157,7 @@
         </p:nvSpPr>
         <p:spPr>
           <a:xfrm>
-            <a:off x="4572000" y="2880360"/>
+            <a:off x="4572000" y="3429000"/>
             <a:ext cx="3840480" cy="365760"/>
           </a:xfrm>
           <a:prstGeom prst="rect">
@@ -13196,7 +13196,7 @@
         </p:nvSpPr>
         <p:spPr>
           <a:xfrm>
-            <a:off x="640080" y="3456432"/>
+            <a:off x="640080" y="4005072"/>
             <a:ext cx="7863840" cy="228600"/>
           </a:xfrm>
           <a:prstGeom prst="rect">
@@ -13221,7 +13221,7 @@
                 <a:ea typeface="Calibri" pitchFamily="34" charset="-122"/>
                 <a:cs typeface="Calibri" pitchFamily="34" charset="-120"/>
               </a:rPr>
-              <a:t>mcporter cho phep ket noi voi MCP ecosystem (Model Context Protocol)</a:t>
+              <a:t>mcporter cho phép kết nối với MCP ecosystem (Model Context Protocol)</a:t>
             </a:r>
             <a:endParaRPr lang="en-US" sz="1000" dirty="0"/>
           </a:p>
@@ -13235,7 +13235,7 @@
         </p:nvSpPr>
         <p:spPr>
           <a:xfrm>
-            <a:off x="457200" y="3840480"/>
+            <a:off x="457200" y="4370832"/>
             <a:ext cx="8229600" cy="36576"/>
           </a:xfrm>
           <a:prstGeom prst="rect">
@@ -13260,7 +13260,7 @@
         </p:nvSpPr>
         <p:spPr>
           <a:xfrm>
-            <a:off x="457200" y="3913632"/>
+            <a:off x="457200" y="4443984"/>
             <a:ext cx="8229600" cy="274320"/>
           </a:xfrm>
           <a:prstGeom prst="rect">
@@ -13285,7 +13285,7 @@
                 <a:ea typeface="Calibri" pitchFamily="34" charset="-122"/>
                 <a:cs typeface="Calibri" pitchFamily="34" charset="-120"/>
               </a:rPr>
-              <a:t>Nguyen tac: Open/Closed Principle — Mo rong khong sua doi core</a:t>
+              <a:t>Nguyên tắc: Open/Closed Principle — Mở rộng không sửa đổi core</a:t>
             </a:r>
             <a:endParaRPr lang="en-US" sz="1200" dirty="0"/>
           </a:p>
@@ -13381,7 +13381,7 @@
                 <a:ea typeface="Arial Black" pitchFamily="34" charset="-122"/>
                 <a:cs typeface="Arial Black" pitchFamily="34" charset="-120"/>
               </a:rPr>
-              <a:t>Ung Dung Mobile</a:t>
+              <a:t>Ứng Dụng Mobile</a:t>
             </a:r>
             <a:endParaRPr lang="en-US" sz="3200" dirty="0"/>
           </a:p>
@@ -13395,12 +13395,12 @@
         </p:nvSpPr>
         <p:spPr>
           <a:xfrm>
-            <a:off x="365760" y="777240"/>
-            <a:ext cx="2743200" cy="3200400"/>
+            <a:off x="320040" y="777240"/>
+            <a:ext cx="2514600" cy="3200400"/>
           </a:xfrm>
           <a:prstGeom prst="roundRect">
             <a:avLst>
-              <a:gd name="adj" fmla="val 3333"/>
+              <a:gd name="adj" fmla="val 3636"/>
             </a:avLst>
           </a:prstGeom>
           <a:solidFill>
@@ -13429,8 +13429,8 @@
         </p:nvSpPr>
         <p:spPr>
           <a:xfrm>
-            <a:off x="365760" y="777240"/>
-            <a:ext cx="2743200" cy="594360"/>
+            <a:off x="320040" y="777240"/>
+            <a:ext cx="2514600" cy="594360"/>
           </a:xfrm>
           <a:prstGeom prst="roundRect">
             <a:avLst>
@@ -13456,8 +13456,8 @@
         </p:nvSpPr>
         <p:spPr>
           <a:xfrm>
-            <a:off x="365760" y="777240"/>
-            <a:ext cx="2743200" cy="594360"/>
+            <a:off x="320040" y="777240"/>
+            <a:ext cx="2514600" cy="594360"/>
           </a:xfrm>
           <a:prstGeom prst="rect">
             <a:avLst/>
@@ -13495,7 +13495,7 @@
         </p:nvSpPr>
         <p:spPr>
           <a:xfrm>
-            <a:off x="548640" y="1581912"/>
+            <a:off x="502920" y="1581912"/>
             <a:ext cx="54864" cy="54864"/>
           </a:xfrm>
           <a:prstGeom prst="rect">
@@ -13520,8 +13520,8 @@
         </p:nvSpPr>
         <p:spPr>
           <a:xfrm>
-            <a:off x="685800" y="1463040"/>
-            <a:ext cx="2331720" cy="347472"/>
+            <a:off x="640080" y="1463040"/>
+            <a:ext cx="2240280" cy="347472"/>
           </a:xfrm>
           <a:prstGeom prst="rect">
             <a:avLst/>
@@ -13559,7 +13559,7 @@
         </p:nvSpPr>
         <p:spPr>
           <a:xfrm>
-            <a:off x="548640" y="2011680"/>
+            <a:off x="502920" y="2011680"/>
             <a:ext cx="54864" cy="54864"/>
           </a:xfrm>
           <a:prstGeom prst="rect">
@@ -13584,8 +13584,8 @@
         </p:nvSpPr>
         <p:spPr>
           <a:xfrm>
-            <a:off x="685800" y="1892808"/>
-            <a:ext cx="2331720" cy="347472"/>
+            <a:off x="640080" y="1892808"/>
+            <a:ext cx="2240280" cy="347472"/>
           </a:xfrm>
           <a:prstGeom prst="rect">
             <a:avLst/>
@@ -13623,7 +13623,7 @@
         </p:nvSpPr>
         <p:spPr>
           <a:xfrm>
-            <a:off x="548640" y="2441448"/>
+            <a:off x="502920" y="2441448"/>
             <a:ext cx="54864" cy="54864"/>
           </a:xfrm>
           <a:prstGeom prst="rect">
@@ -13648,8 +13648,8 @@
         </p:nvSpPr>
         <p:spPr>
           <a:xfrm>
-            <a:off x="685800" y="2322576"/>
-            <a:ext cx="2331720" cy="347472"/>
+            <a:off x="640080" y="2322576"/>
+            <a:ext cx="2240280" cy="347472"/>
           </a:xfrm>
           <a:prstGeom prst="rect">
             <a:avLst/>
@@ -13687,7 +13687,7 @@
         </p:nvSpPr>
         <p:spPr>
           <a:xfrm>
-            <a:off x="548640" y="2871216"/>
+            <a:off x="502920" y="2871216"/>
             <a:ext cx="54864" cy="54864"/>
           </a:xfrm>
           <a:prstGeom prst="rect">
@@ -13712,8 +13712,8 @@
         </p:nvSpPr>
         <p:spPr>
           <a:xfrm>
-            <a:off x="685800" y="2752344"/>
-            <a:ext cx="2331720" cy="347472"/>
+            <a:off x="640080" y="2752344"/>
+            <a:ext cx="2240280" cy="347472"/>
           </a:xfrm>
           <a:prstGeom prst="rect">
             <a:avLst/>
@@ -13751,7 +13751,7 @@
         </p:nvSpPr>
         <p:spPr>
           <a:xfrm>
-            <a:off x="548640" y="3300984"/>
+            <a:off x="502920" y="3300984"/>
             <a:ext cx="54864" cy="54864"/>
           </a:xfrm>
           <a:prstGeom prst="rect">
@@ -13776,8 +13776,8 @@
         </p:nvSpPr>
         <p:spPr>
           <a:xfrm>
-            <a:off x="685800" y="3182112"/>
-            <a:ext cx="2331720" cy="347472"/>
+            <a:off x="640080" y="3182112"/>
+            <a:ext cx="2240280" cy="347472"/>
           </a:xfrm>
           <a:prstGeom prst="rect">
             <a:avLst/>
@@ -13816,11 +13816,11 @@
         <p:spPr>
           <a:xfrm>
             <a:off x="3246120" y="777240"/>
-            <a:ext cx="2743200" cy="3200400"/>
+            <a:ext cx="2514600" cy="3200400"/>
           </a:xfrm>
           <a:prstGeom prst="roundRect">
             <a:avLst>
-              <a:gd name="adj" fmla="val 3333"/>
+              <a:gd name="adj" fmla="val 3636"/>
             </a:avLst>
           </a:prstGeom>
           <a:solidFill>
@@ -13850,7 +13850,7 @@
         <p:spPr>
           <a:xfrm>
             <a:off x="3246120" y="777240"/>
-            <a:ext cx="2743200" cy="594360"/>
+            <a:ext cx="2514600" cy="594360"/>
           </a:xfrm>
           <a:prstGeom prst="roundRect">
             <a:avLst>
@@ -13877,7 +13877,7 @@
         <p:spPr>
           <a:xfrm>
             <a:off x="3246120" y="777240"/>
-            <a:ext cx="2743200" cy="594360"/>
+            <a:ext cx="2514600" cy="594360"/>
           </a:xfrm>
           <a:prstGeom prst="rect">
             <a:avLst/>
@@ -13941,7 +13941,7 @@
         <p:spPr>
           <a:xfrm>
             <a:off x="3566160" y="1463040"/>
-            <a:ext cx="2331720" cy="347472"/>
+            <a:ext cx="2240280" cy="347472"/>
           </a:xfrm>
           <a:prstGeom prst="rect">
             <a:avLst/>
@@ -14005,7 +14005,7 @@
         <p:spPr>
           <a:xfrm>
             <a:off x="3566160" y="1892808"/>
-            <a:ext cx="2331720" cy="347472"/>
+            <a:ext cx="2240280" cy="347472"/>
           </a:xfrm>
           <a:prstGeom prst="rect">
             <a:avLst/>
@@ -14069,7 +14069,7 @@
         <p:spPr>
           <a:xfrm>
             <a:off x="3566160" y="2322576"/>
-            <a:ext cx="2331720" cy="347472"/>
+            <a:ext cx="2240280" cy="347472"/>
           </a:xfrm>
           <a:prstGeom prst="rect">
             <a:avLst/>
@@ -14133,7 +14133,7 @@
         <p:spPr>
           <a:xfrm>
             <a:off x="3566160" y="2752344"/>
-            <a:ext cx="2331720" cy="347472"/>
+            <a:ext cx="2240280" cy="347472"/>
           </a:xfrm>
           <a:prstGeom prst="rect">
             <a:avLst/>
@@ -14197,7 +14197,7 @@
         <p:spPr>
           <a:xfrm>
             <a:off x="3566160" y="3182112"/>
-            <a:ext cx="2331720" cy="347472"/>
+            <a:ext cx="2240280" cy="347472"/>
           </a:xfrm>
           <a:prstGeom prst="rect">
             <a:avLst/>
@@ -14261,7 +14261,7 @@
         <p:spPr>
           <a:xfrm>
             <a:off x="3566160" y="3611880"/>
-            <a:ext cx="2331720" cy="347472"/>
+            <a:ext cx="2240280" cy="347472"/>
           </a:xfrm>
           <a:prstGeom prst="rect">
             <a:avLst/>
@@ -14299,12 +14299,12 @@
         </p:nvSpPr>
         <p:spPr>
           <a:xfrm>
-            <a:off x="6126480" y="777240"/>
-            <a:ext cx="2743200" cy="3200400"/>
+            <a:off x="6172200" y="777240"/>
+            <a:ext cx="2514600" cy="3200400"/>
           </a:xfrm>
           <a:prstGeom prst="roundRect">
             <a:avLst>
-              <a:gd name="adj" fmla="val 3333"/>
+              <a:gd name="adj" fmla="val 3636"/>
             </a:avLst>
           </a:prstGeom>
           <a:solidFill>
@@ -14333,8 +14333,8 @@
         </p:nvSpPr>
         <p:spPr>
           <a:xfrm>
-            <a:off x="6126480" y="777240"/>
-            <a:ext cx="2743200" cy="594360"/>
+            <a:off x="6172200" y="777240"/>
+            <a:ext cx="2514600" cy="594360"/>
           </a:xfrm>
           <a:prstGeom prst="roundRect">
             <a:avLst>
@@ -14360,8 +14360,8 @@
         </p:nvSpPr>
         <p:spPr>
           <a:xfrm>
-            <a:off x="6126480" y="777240"/>
-            <a:ext cx="2743200" cy="594360"/>
+            <a:off x="6172200" y="777240"/>
+            <a:ext cx="2514600" cy="594360"/>
           </a:xfrm>
           <a:prstGeom prst="rect">
             <a:avLst/>
@@ -14399,7 +14399,7 @@
         </p:nvSpPr>
         <p:spPr>
           <a:xfrm>
-            <a:off x="6309360" y="1581912"/>
+            <a:off x="6355080" y="1581912"/>
             <a:ext cx="54864" cy="54864"/>
           </a:xfrm>
           <a:prstGeom prst="rect">
@@ -14424,8 +14424,8 @@
         </p:nvSpPr>
         <p:spPr>
           <a:xfrm>
-            <a:off x="6446520" y="1463040"/>
-            <a:ext cx="2331720" cy="347472"/>
+            <a:off x="6492240" y="1463040"/>
+            <a:ext cx="2240280" cy="347472"/>
           </a:xfrm>
           <a:prstGeom prst="rect">
             <a:avLst/>
@@ -14463,7 +14463,7 @@
         </p:nvSpPr>
         <p:spPr>
           <a:xfrm>
-            <a:off x="6309360" y="2011680"/>
+            <a:off x="6355080" y="2011680"/>
             <a:ext cx="54864" cy="54864"/>
           </a:xfrm>
           <a:prstGeom prst="rect">
@@ -14488,8 +14488,8 @@
         </p:nvSpPr>
         <p:spPr>
           <a:xfrm>
-            <a:off x="6446520" y="1892808"/>
-            <a:ext cx="2331720" cy="347472"/>
+            <a:off x="6492240" y="1892808"/>
+            <a:ext cx="2240280" cy="347472"/>
           </a:xfrm>
           <a:prstGeom prst="rect">
             <a:avLst/>
@@ -14527,7 +14527,7 @@
         </p:nvSpPr>
         <p:spPr>
           <a:xfrm>
-            <a:off x="6309360" y="2441448"/>
+            <a:off x="6355080" y="2441448"/>
             <a:ext cx="54864" cy="54864"/>
           </a:xfrm>
           <a:prstGeom prst="rect">
@@ -14552,8 +14552,8 @@
         </p:nvSpPr>
         <p:spPr>
           <a:xfrm>
-            <a:off x="6446520" y="2322576"/>
-            <a:ext cx="2331720" cy="347472"/>
+            <a:off x="6492240" y="2322576"/>
+            <a:ext cx="2240280" cy="347472"/>
           </a:xfrm>
           <a:prstGeom prst="rect">
             <a:avLst/>
@@ -14591,7 +14591,7 @@
         </p:nvSpPr>
         <p:spPr>
           <a:xfrm>
-            <a:off x="6309360" y="2871216"/>
+            <a:off x="6355080" y="2871216"/>
             <a:ext cx="54864" cy="54864"/>
           </a:xfrm>
           <a:prstGeom prst="rect">
@@ -14616,8 +14616,8 @@
         </p:nvSpPr>
         <p:spPr>
           <a:xfrm>
-            <a:off x="6446520" y="2752344"/>
-            <a:ext cx="2331720" cy="347472"/>
+            <a:off x="6492240" y="2752344"/>
+            <a:ext cx="2240280" cy="347472"/>
           </a:xfrm>
           <a:prstGeom prst="rect">
             <a:avLst/>
@@ -14655,7 +14655,7 @@
         </p:nvSpPr>
         <p:spPr>
           <a:xfrm>
-            <a:off x="6309360" y="3300984"/>
+            <a:off x="6355080" y="3300984"/>
             <a:ext cx="54864" cy="54864"/>
           </a:xfrm>
           <a:prstGeom prst="rect">
@@ -14680,8 +14680,8 @@
         </p:nvSpPr>
         <p:spPr>
           <a:xfrm>
-            <a:off x="6446520" y="3182112"/>
-            <a:ext cx="2331720" cy="347472"/>
+            <a:off x="6492240" y="3182112"/>
+            <a:ext cx="2240280" cy="347472"/>
           </a:xfrm>
           <a:prstGeom prst="rect">
             <a:avLst/>
@@ -15005,7 +15005,7 @@
                 <a:ea typeface="Calibri" pitchFamily="34" charset="-122"/>
                 <a:cs typeface="Calibri" pitchFamily="34" charset="-120"/>
               </a:rPr>
-              <a:t>Ket noi qua: Local WiFi / Tailscale / Relay Server</a:t>
+              <a:t>Kết nối qua: Local WiFi / Tailscale / Relay Server</a:t>
             </a:r>
             <a:endParaRPr lang="en-US" sz="1000" dirty="0"/>
           </a:p>
@@ -15101,7 +15101,7 @@
                 <a:ea typeface="Calibri" pitchFamily="34" charset="-122"/>
                 <a:cs typeface="Calibri" pitchFamily="34" charset="-120"/>
               </a:rPr>
-              <a:t>So Sanh &amp; Benchmark — Phan Tich</a:t>
+              <a:t>So Sánh &amp; Benchmark — Phân Tích</a:t>
             </a:r>
             <a:endParaRPr lang="en-US" sz="2800" dirty="0"/>
           </a:p>
@@ -15140,7 +15140,7 @@
         </p:nvGraphicFramePr>
         <p:xfrm>
           <a:off x="457200" y="822960"/>
-          <a:ext cx="5669280" cy="2743200"/>
+          <a:ext cx="5669280" cy="3474720"/>
         </p:xfrm>
         <a:graphic xmlns:a="http://schemas.openxmlformats.org/drawingml/2006/main">
           <a:graphicData uri="http://schemas.openxmlformats.org/drawingml/2006/chart">
@@ -15181,7 +15181,7 @@
                 <a:ea typeface="Calibri" pitchFamily="34" charset="-122"/>
                 <a:cs typeface="Calibri" pitchFamily="34" charset="-120"/>
               </a:rPr>
-              <a:t>3 Diem Khac Biet:</a:t>
+              <a:t>3 Điểm Khác Biệt:</a:t>
             </a:r>
             <a:endParaRPr lang="en-US" sz="1300" dirty="0"/>
           </a:p>
@@ -15254,7 +15254,7 @@
                 <a:ea typeface="Calibri" pitchFamily="34" charset="-122"/>
                 <a:cs typeface="Calibri" pitchFamily="34" charset="-120"/>
               </a:rPr>
-              <a:t>Duy nhat co Zalo</a:t>
+              <a:t>Duy nhất có Zalo</a:t>
             </a:r>
             <a:endParaRPr lang="en-US" sz="1200" dirty="0"/>
           </a:p>
@@ -15293,7 +15293,7 @@
                 <a:ea typeface="Calibri" pitchFamily="34" charset="-122"/>
                 <a:cs typeface="Calibri" pitchFamily="34" charset="-120"/>
               </a:rPr>
-              <a:t>Kenh Vietnam</a:t>
+              <a:t>Kênh Vietnam</a:t>
             </a:r>
             <a:endParaRPr lang="en-US" sz="1000" dirty="0"/>
           </a:p>
@@ -15366,7 +15366,7 @@
                 <a:ea typeface="Calibri" pitchFamily="34" charset="-122"/>
                 <a:cs typeface="Calibri" pitchFamily="34" charset="-120"/>
               </a:rPr>
-              <a:t>Chay Local (Ollama)</a:t>
+              <a:t>Chạy Local (Ollama)</a:t>
             </a:r>
             <a:endParaRPr lang="en-US" sz="1200" dirty="0"/>
           </a:p>
@@ -15531,7 +15531,7 @@
         </p:nvSpPr>
         <p:spPr>
           <a:xfrm>
-            <a:off x="457200" y="3639312"/>
+            <a:off x="457200" y="4343400"/>
             <a:ext cx="8229600" cy="228600"/>
           </a:xfrm>
           <a:prstGeom prst="rect">
@@ -15556,7 +15556,7 @@
                 <a:ea typeface="Calibri" pitchFamily="34" charset="-122"/>
                 <a:cs typeface="Calibri" pitchFamily="34" charset="-120"/>
               </a:rPr>
-              <a:t>(Diem 1-10, danh gia chu quan. 10 = tot nhat cho tieu chi do)</a:t>
+              <a:t>(Điểm 1-10, đánh giá chủ quan. 10 = tốt nhất cho tiêu chí đó)</a:t>
             </a:r>
             <a:endParaRPr lang="en-US" sz="900" dirty="0"/>
           </a:p>
@@ -15652,7 +15652,7 @@
                 <a:ea typeface="Calibri" pitchFamily="34" charset="-122"/>
                 <a:cs typeface="Calibri" pitchFamily="34" charset="-120"/>
               </a:rPr>
-              <a:t>Design Patterns — Bai Hoc Kien Truc</a:t>
+              <a:t>Design Patterns — Bài Học Kiến Trúc</a:t>
             </a:r>
             <a:endParaRPr lang="en-US" sz="2800" dirty="0"/>
           </a:p>
@@ -16021,7 +16021,7 @@
                 <a:ea typeface="Calibri" pitchFamily="34" charset="-122"/>
                 <a:cs typeface="Calibri" pitchFamily="34" charset="-120"/>
               </a:rPr>
-              <a:t>Interface chung cho tat ca channels</a:t>
+              <a:t>Interface chung cho tất cả channels</a:t>
             </a:r>
             <a:endParaRPr lang="en-US" sz="1100" dirty="0"/>
           </a:p>
@@ -16465,7 +16465,7 @@
                 <a:ea typeface="Calibri" pitchFamily="34" charset="-122"/>
                 <a:cs typeface="Calibri" pitchFamily="34" charset="-120"/>
               </a:rPr>
-              <a:t>Mo rong khong sua doi core</a:t>
+              <a:t>Mở rộng không sửa đổi core</a:t>
             </a:r>
             <a:endParaRPr lang="en-US" sz="1100" dirty="0"/>
           </a:p>
@@ -16687,7 +16687,7 @@
                 <a:ea typeface="Calibri" pitchFamily="34" charset="-122"/>
                 <a:cs typeface="Calibri" pitchFamily="34" charset="-120"/>
               </a:rPr>
-              <a:t>Kiem tra truoc khi thuc thi</a:t>
+              <a:t>Kiểm tra trước khi thực thi</a:t>
             </a:r>
             <a:endParaRPr lang="en-US" sz="1100" dirty="0"/>
           </a:p>
@@ -16909,7 +16909,7 @@
                 <a:ea typeface="Calibri" pitchFamily="34" charset="-122"/>
                 <a:cs typeface="Calibri" pitchFamily="34" charset="-120"/>
               </a:rPr>
-              <a:t>Tu dong chuyen khi loi</a:t>
+              <a:t>Tự động chuyển khi lỗi</a:t>
             </a:r>
             <a:endParaRPr lang="en-US" sz="1100" dirty="0"/>
           </a:p>
@@ -17088,7 +17088,7 @@
                 <a:ea typeface="Arial Black" pitchFamily="34" charset="-122"/>
                 <a:cs typeface="Arial Black" pitchFamily="34" charset="-120"/>
               </a:rPr>
-              <a:t>Roadmap &amp; Tuong Lai</a:t>
+              <a:t>Roadmap &amp; Tương Lai</a:t>
             </a:r>
             <a:endParaRPr lang="en-US" sz="3200" dirty="0"/>
           </a:p>
@@ -17188,7 +17188,7 @@
                 <a:ea typeface="Calibri" pitchFamily="34" charset="-122"/>
                 <a:cs typeface="Calibri" pitchFamily="34" charset="-120"/>
               </a:rPr>
-              <a:t>Da phat hanh (v2026.3.11)</a:t>
+              <a:t>Đã phát hành (v2026.3.11)</a:t>
             </a:r>
             <a:endParaRPr lang="en-US" sz="1300" dirty="0"/>
           </a:p>
@@ -17252,7 +17252,7 @@
                 <a:ea typeface="Calibri" pitchFamily="34" charset="-122"/>
                 <a:cs typeface="Calibri" pitchFamily="34" charset="-120"/>
               </a:rPr>
-              <a:t>7 CVE fixes bao mat nghiem trong</a:t>
+              <a:t>7 CVE fixes bảo mật nghiêm trọng</a:t>
             </a:r>
             <a:endParaRPr lang="en-US" sz="1100" dirty="0"/>
           </a:p>
@@ -17736,7 +17736,7 @@
                 <a:ea typeface="Calibri" pitchFamily="34" charset="-122"/>
                 <a:cs typeface="Calibri" pitchFamily="34" charset="-120"/>
               </a:rPr>
-              <a:t>Dang phat trien</a:t>
+              <a:t>Đang phát triển</a:t>
             </a:r>
             <a:endParaRPr lang="en-US" sz="1300" dirty="0"/>
           </a:p>
@@ -17800,7 +17800,7 @@
                 <a:ea typeface="Calibri" pitchFamily="34" charset="-122"/>
                 <a:cs typeface="Calibri" pitchFamily="34" charset="-120"/>
               </a:rPr>
-              <a:t>7 CVE fixes bo sung</a:t>
+              <a:t>7 CVE fixes bổ sung</a:t>
             </a:r>
             <a:endParaRPr lang="en-US" sz="1100" dirty="0"/>
           </a:p>
@@ -18250,7 +18250,7 @@
                 <a:ea typeface="Calibri" pitchFamily="34" charset="-122"/>
                 <a:cs typeface="Calibri" pitchFamily="34" charset="-120"/>
               </a:rPr>
-              <a:t>Dinh huong tuong lai:</a:t>
+              <a:t>Định hướng tương lai:</a:t>
             </a:r>
             <a:endParaRPr lang="en-US" sz="1200" dirty="0"/>
           </a:p>
@@ -18607,7 +18607,7 @@
                 <a:ea typeface="Calibri" pitchFamily="34" charset="-122"/>
                 <a:cs typeface="Calibri" pitchFamily="34" charset="-120"/>
               </a:rPr>
-              <a:t>Quick Start — Cai Dat &amp; Cau Hinh</a:t>
+              <a:t>Quick Start — Cài Đặt &amp; Cấu Hình</a:t>
             </a:r>
             <a:endParaRPr lang="en-US" sz="2800" dirty="0"/>
           </a:p>
@@ -18776,7 +18776,7 @@
                 <a:ea typeface="Calibri" pitchFamily="34" charset="-122"/>
                 <a:cs typeface="Calibri" pitchFamily="34" charset="-120"/>
               </a:rPr>
-              <a:t>Cai dat</a:t>
+              <a:t>Cài đặt</a:t>
             </a:r>
             <a:endParaRPr lang="en-US" sz="1400" dirty="0"/>
           </a:p>
@@ -18881,7 +18881,7 @@
                 <a:ea typeface="Calibri" pitchFamily="34" charset="-122"/>
                 <a:cs typeface="Calibri" pitchFamily="34" charset="-120"/>
               </a:rPr>
-              <a:t>Yeu cau Node.js &gt;= 22</a:t>
+              <a:t>Yêu cầu Node.js &gt;= 22</a:t>
             </a:r>
             <a:endParaRPr lang="en-US" sz="1000" dirty="0"/>
           </a:p>
@@ -19025,7 +19025,7 @@
                 <a:ea typeface="Calibri" pitchFamily="34" charset="-122"/>
                 <a:cs typeface="Calibri" pitchFamily="34" charset="-120"/>
               </a:rPr>
-              <a:t>Chay Wizard</a:t>
+              <a:t>Chạy Wizard</a:t>
             </a:r>
             <a:endParaRPr lang="en-US" sz="1400" dirty="0"/>
           </a:p>
@@ -19130,7 +19130,7 @@
                 <a:ea typeface="Calibri" pitchFamily="34" charset="-122"/>
                 <a:cs typeface="Calibri" pitchFamily="34" charset="-120"/>
               </a:rPr>
-              <a:t>Cai dat daemon, chon kenh va LLM</a:t>
+              <a:t>Cài đặt daemon, chọn kênh và LLM</a:t>
             </a:r>
             <a:endParaRPr lang="en-US" sz="1000" dirty="0"/>
           </a:p>
@@ -19274,7 +19274,7 @@
                 <a:ea typeface="Calibri" pitchFamily="34" charset="-122"/>
                 <a:cs typeface="Calibri" pitchFamily="34" charset="-120"/>
               </a:rPr>
-              <a:t>Kiem tra</a:t>
+              <a:t>Kiểm tra</a:t>
             </a:r>
             <a:endParaRPr lang="en-US" sz="1400" dirty="0"/>
           </a:p>
@@ -19379,7 +19379,7 @@
                 <a:ea typeface="Calibri" pitchFamily="34" charset="-122"/>
                 <a:cs typeface="Calibri" pitchFamily="34" charset="-120"/>
               </a:rPr>
-              <a:t>Roi thu: openclaw agent --message "Hello"</a:t>
+              <a:t>Rồi thử: openclaw agent --message "Hello"</a:t>
             </a:r>
             <a:endParaRPr lang="en-US" sz="1000" dirty="0"/>
           </a:p>
@@ -19479,7 +19479,7 @@
                 <a:ea typeface="Calibri" pitchFamily="34" charset="-122"/>
                 <a:cs typeface="Calibri" pitchFamily="34" charset="-120"/>
               </a:rPr>
-              <a:t>~/.openclaw/config.json — Cau hinh chinh</a:t>
+              <a:t>~/.openclaw/config.json — Cấu hình chính</a:t>
             </a:r>
             <a:endParaRPr lang="en-US" sz="1000" dirty="0"/>
           </a:p>
@@ -21043,7 +21043,7 @@
                 <a:ea typeface="Arial Black" pitchFamily="34" charset="-122"/>
                 <a:cs typeface="Arial Black" pitchFamily="34" charset="-120"/>
               </a:rPr>
-              <a:t>Use Cases Thuc Te</a:t>
+              <a:t>Use Cases Thực Tế</a:t>
             </a:r>
             <a:endParaRPr lang="en-US" sz="3200" dirty="0"/>
           </a:p>
@@ -21092,7 +21092,7 @@
         <p:spPr>
           <a:xfrm>
             <a:off x="365760" y="777240"/>
-            <a:ext cx="2743200" cy="594360"/>
+            <a:ext cx="2606040" cy="594360"/>
           </a:xfrm>
           <a:prstGeom prst="roundRect">
             <a:avLst>
@@ -21119,7 +21119,7 @@
         <p:spPr>
           <a:xfrm>
             <a:off x="365760" y="777240"/>
-            <a:ext cx="2743200" cy="594360"/>
+            <a:ext cx="2606040" cy="594360"/>
           </a:xfrm>
           <a:prstGeom prst="rect">
             <a:avLst/>
@@ -21207,7 +21207,7 @@
                 <a:ea typeface="Calibri" pitchFamily="34" charset="-122"/>
                 <a:cs typeface="Calibri" pitchFamily="34" charset="-120"/>
               </a:rPr>
-              <a:t>Cron job bao cao hang ngay</a:t>
+              <a:t>Cron job báo cáo hàng ngày</a:t>
             </a:r>
             <a:endParaRPr lang="en-US" sz="1100" dirty="0"/>
           </a:p>
@@ -21578,7 +21578,7 @@
         <p:spPr>
           <a:xfrm>
             <a:off x="3246120" y="777240"/>
-            <a:ext cx="2743200" cy="594360"/>
+            <a:ext cx="2606040" cy="594360"/>
           </a:xfrm>
           <a:prstGeom prst="roundRect">
             <a:avLst>
@@ -21605,7 +21605,7 @@
         <p:spPr>
           <a:xfrm>
             <a:off x="3246120" y="777240"/>
-            <a:ext cx="2743200" cy="594360"/>
+            <a:ext cx="2606040" cy="594360"/>
           </a:xfrm>
           <a:prstGeom prst="rect">
             <a:avLst/>
@@ -21757,7 +21757,7 @@
                 <a:ea typeface="Calibri" pitchFamily="34" charset="-122"/>
                 <a:cs typeface="Calibri" pitchFamily="34" charset="-120"/>
               </a:rPr>
-              <a:t>Claude Haiku (re chi phi)</a:t>
+              <a:t>Claude Haiku (rẻ chi phí)</a:t>
             </a:r>
             <a:endParaRPr lang="en-US" sz="1100" dirty="0"/>
           </a:p>
@@ -22064,7 +22064,7 @@
         <p:spPr>
           <a:xfrm>
             <a:off x="6126480" y="777240"/>
-            <a:ext cx="2743200" cy="594360"/>
+            <a:ext cx="2606040" cy="594360"/>
           </a:xfrm>
           <a:prstGeom prst="roundRect">
             <a:avLst>
@@ -22091,7 +22091,7 @@
         <p:spPr>
           <a:xfrm>
             <a:off x="6126480" y="777240"/>
-            <a:ext cx="2743200" cy="594360"/>
+            <a:ext cx="2606040" cy="594360"/>
           </a:xfrm>
           <a:prstGeom prst="rect">
             <a:avLst/>
@@ -22597,7 +22597,7 @@
                 <a:ea typeface="Calibri" pitchFamily="34" charset="-122"/>
                 <a:cs typeface="Calibri" pitchFamily="34" charset="-120"/>
               </a:rPr>
-              <a:t>Data Flow — Vi Du Thuc Te</a:t>
+              <a:t>Data Flow — Ví Dụ Thực Tế</a:t>
             </a:r>
             <a:endParaRPr lang="en-US" sz="2800" dirty="0"/>
           </a:p>
@@ -22688,7 +22688,7 @@
                 <a:ea typeface="Calibri" pitchFamily="34" charset="-122"/>
                 <a:cs typeface="Calibri" pitchFamily="34" charset="-120"/>
               </a:rPr>
-              <a:t>Vi du: User Telegram hoi "Thoi tiet Ha Noi hom nay nhu the nao?"</a:t>
+              <a:t>Ví dụ: User Telegram hỏi "Thời tiết Hà Nội hôm nay như thế nào?"</a:t>
             </a:r>
             <a:endParaRPr lang="en-US" sz="1100" dirty="0"/>
           </a:p>
@@ -22811,8 +22811,8 @@
         </p:nvSpPr>
         <p:spPr>
           <a:xfrm>
-            <a:off x="228600" y="1901952"/>
-            <a:ext cx="1097280" cy="365760"/>
+            <a:off x="201168" y="1901952"/>
+            <a:ext cx="1152144" cy="384048"/>
           </a:xfrm>
           <a:prstGeom prst="rect">
             <a:avLst/>
@@ -22828,7 +22828,7 @@
               <a:buNone/>
             </a:pPr>
             <a:r>
-              <a:rPr lang="en-US" sz="800" dirty="0">
+              <a:rPr lang="en-US" sz="700" dirty="0">
                 <a:solidFill>
                   <a:srgbClr val="6B7A8D"/>
                 </a:solidFill>
@@ -22836,9 +22836,9 @@
                 <a:ea typeface="Calibri" pitchFamily="34" charset="-122"/>
                 <a:cs typeface="Calibri" pitchFamily="34" charset="-120"/>
               </a:rPr>
-              <a:t>Gui tin nhan</a:t>
-            </a:r>
-            <a:endParaRPr lang="en-US" sz="800" dirty="0"/>
+              <a:t>Gửi tin nhắn</a:t>
+            </a:r>
+            <a:endParaRPr lang="en-US" sz="700" dirty="0"/>
           </a:p>
         </p:txBody>
       </p:sp>
@@ -22959,8 +22959,8 @@
         </p:nvSpPr>
         <p:spPr>
           <a:xfrm>
-            <a:off x="1371600" y="1901952"/>
-            <a:ext cx="1097280" cy="365760"/>
+            <a:off x="1344168" y="1901952"/>
+            <a:ext cx="1152144" cy="384048"/>
           </a:xfrm>
           <a:prstGeom prst="rect">
             <a:avLst/>
@@ -22976,7 +22976,7 @@
               <a:buNone/>
             </a:pPr>
             <a:r>
-              <a:rPr lang="en-US" sz="800" dirty="0">
+              <a:rPr lang="en-US" sz="700" dirty="0">
                 <a:solidFill>
                   <a:srgbClr val="6B7A8D"/>
                 </a:solidFill>
@@ -22986,7 +22986,7 @@
               </a:rPr>
               <a:t>Parse Telegram message</a:t>
             </a:r>
-            <a:endParaRPr lang="en-US" sz="800" dirty="0"/>
+            <a:endParaRPr lang="en-US" sz="700" dirty="0"/>
           </a:p>
         </p:txBody>
       </p:sp>
@@ -23107,8 +23107,8 @@
         </p:nvSpPr>
         <p:spPr>
           <a:xfrm>
-            <a:off x="2514600" y="1901952"/>
-            <a:ext cx="1097280" cy="365760"/>
+            <a:off x="2487168" y="1901952"/>
+            <a:ext cx="1152144" cy="384048"/>
           </a:xfrm>
           <a:prstGeom prst="rect">
             <a:avLst/>
@@ -23124,7 +23124,7 @@
               <a:buNone/>
             </a:pPr>
             <a:r>
-              <a:rPr lang="en-US" sz="800" dirty="0">
+              <a:rPr lang="en-US" sz="700" dirty="0">
                 <a:solidFill>
                   <a:srgbClr val="6B7A8D"/>
                 </a:solidFill>
@@ -23132,9 +23132,9 @@
                 <a:ea typeface="Calibri" pitchFamily="34" charset="-122"/>
                 <a:cs typeface="Calibri" pitchFamily="34" charset="-120"/>
               </a:rPr>
-              <a:t>Nhan WebSocket event</a:t>
-            </a:r>
-            <a:endParaRPr lang="en-US" sz="800" dirty="0"/>
+              <a:t>Nhận WebSocket event</a:t>
+            </a:r>
+            <a:endParaRPr lang="en-US" sz="700" dirty="0"/>
           </a:p>
         </p:txBody>
       </p:sp>
@@ -23255,8 +23255,8 @@
         </p:nvSpPr>
         <p:spPr>
           <a:xfrm>
-            <a:off x="3657600" y="1901952"/>
-            <a:ext cx="1097280" cy="365760"/>
+            <a:off x="3630168" y="1901952"/>
+            <a:ext cx="1152144" cy="384048"/>
           </a:xfrm>
           <a:prstGeom prst="rect">
             <a:avLst/>
@@ -23272,7 +23272,7 @@
               <a:buNone/>
             </a:pPr>
             <a:r>
-              <a:rPr lang="en-US" sz="800" dirty="0">
+              <a:rPr lang="en-US" sz="700" dirty="0">
                 <a:solidFill>
                   <a:srgbClr val="6B7A8D"/>
                 </a:solidFill>
@@ -23282,7 +23282,7 @@
               </a:rPr>
               <a:t>Validate JWT token</a:t>
             </a:r>
-            <a:endParaRPr lang="en-US" sz="800" dirty="0"/>
+            <a:endParaRPr lang="en-US" sz="700" dirty="0"/>
           </a:p>
         </p:txBody>
       </p:sp>
@@ -23403,8 +23403,8 @@
         </p:nvSpPr>
         <p:spPr>
           <a:xfrm>
-            <a:off x="4800600" y="1901952"/>
-            <a:ext cx="1097280" cy="365760"/>
+            <a:off x="4773168" y="1901952"/>
+            <a:ext cx="1152144" cy="384048"/>
           </a:xfrm>
           <a:prstGeom prst="rect">
             <a:avLst/>
@@ -23420,7 +23420,7 @@
               <a:buNone/>
             </a:pPr>
             <a:r>
-              <a:rPr lang="en-US" sz="800" dirty="0">
+              <a:rPr lang="en-US" sz="700" dirty="0">
                 <a:solidFill>
                   <a:srgbClr val="6B7A8D"/>
                 </a:solidFill>
@@ -23430,7 +23430,7 @@
               </a:rPr>
               <a:t>Route: main agent</a:t>
             </a:r>
-            <a:endParaRPr lang="en-US" sz="800" dirty="0"/>
+            <a:endParaRPr lang="en-US" sz="700" dirty="0"/>
           </a:p>
         </p:txBody>
       </p:sp>
@@ -23551,8 +23551,8 @@
         </p:nvSpPr>
         <p:spPr>
           <a:xfrm>
-            <a:off x="5943600" y="1901952"/>
-            <a:ext cx="1097280" cy="365760"/>
+            <a:off x="5916168" y="1901952"/>
+            <a:ext cx="1152144" cy="384048"/>
           </a:xfrm>
           <a:prstGeom prst="rect">
             <a:avLst/>
@@ -23568,7 +23568,7 @@
               <a:buNone/>
             </a:pPr>
             <a:r>
-              <a:rPr lang="en-US" sz="800" dirty="0">
+              <a:rPr lang="en-US" sz="700" dirty="0">
                 <a:solidFill>
                   <a:srgbClr val="6B7A8D"/>
                 </a:solidFill>
@@ -23578,7 +23578,7 @@
               </a:rPr>
               <a:t>8,432 tokens context</a:t>
             </a:r>
-            <a:endParaRPr lang="en-US" sz="800" dirty="0"/>
+            <a:endParaRPr lang="en-US" sz="700" dirty="0"/>
           </a:p>
         </p:txBody>
       </p:sp>
@@ -23663,8 +23663,8 @@
         </p:nvSpPr>
         <p:spPr>
           <a:xfrm>
-            <a:off x="7086600" y="1901952"/>
-            <a:ext cx="1097280" cy="365760"/>
+            <a:off x="7059168" y="1901952"/>
+            <a:ext cx="1152144" cy="384048"/>
           </a:xfrm>
           <a:prstGeom prst="rect">
             <a:avLst/>
@@ -23680,7 +23680,7 @@
               <a:buNone/>
             </a:pPr>
             <a:r>
-              <a:rPr lang="en-US" sz="800" dirty="0">
+              <a:rPr lang="en-US" sz="700" dirty="0">
                 <a:solidFill>
                   <a:srgbClr val="6B7A8D"/>
                 </a:solidFill>
@@ -23690,7 +23690,7 @@
               </a:rPr>
               <a:t>tool_call: weather_fetch</a:t>
             </a:r>
-            <a:endParaRPr lang="en-US" sz="800" dirty="0"/>
+            <a:endParaRPr lang="en-US" sz="700" dirty="0"/>
           </a:p>
         </p:txBody>
       </p:sp>
@@ -23763,7 +23763,7 @@
                 <a:ea typeface="Calibri" pitchFamily="34" charset="-122"/>
                 <a:cs typeface="Calibri" pitchFamily="34" charset="-120"/>
               </a:rPr>
-              <a:t>↓ tiep theo</a:t>
+              <a:t>↓ tiếp theo</a:t>
             </a:r>
             <a:endParaRPr lang="en-US" sz="800" dirty="0"/>
           </a:p>
@@ -23886,8 +23886,8 @@
         </p:nvSpPr>
         <p:spPr>
           <a:xfrm>
-            <a:off x="228600" y="3136392"/>
-            <a:ext cx="1097280" cy="365760"/>
+            <a:off x="201168" y="3136392"/>
+            <a:ext cx="1152144" cy="384048"/>
           </a:xfrm>
           <a:prstGeom prst="rect">
             <a:avLst/>
@@ -23903,7 +23903,7 @@
               <a:buNone/>
             </a:pPr>
             <a:r>
-              <a:rPr lang="en-US" sz="800" dirty="0">
+              <a:rPr lang="en-US" sz="700" dirty="0">
                 <a:solidFill>
                   <a:srgbClr val="6B7A8D"/>
                 </a:solidFill>
@@ -23913,7 +23913,7 @@
               </a:rPr>
               <a:t>web_fetch weather API</a:t>
             </a:r>
-            <a:endParaRPr lang="en-US" sz="800" dirty="0"/>
+            <a:endParaRPr lang="en-US" sz="700" dirty="0"/>
           </a:p>
         </p:txBody>
       </p:sp>
@@ -24034,8 +24034,8 @@
         </p:nvSpPr>
         <p:spPr>
           <a:xfrm>
-            <a:off x="1371600" y="3136392"/>
-            <a:ext cx="1097280" cy="365760"/>
+            <a:off x="1344168" y="3136392"/>
+            <a:ext cx="1152144" cy="384048"/>
           </a:xfrm>
           <a:prstGeom prst="rect">
             <a:avLst/>
@@ -24051,7 +24051,7 @@
               <a:buNone/>
             </a:pPr>
             <a:r>
-              <a:rPr lang="en-US" sz="800" dirty="0">
+              <a:rPr lang="en-US" sz="700" dirty="0">
                 <a:solidFill>
                   <a:srgbClr val="6B7A8D"/>
                 </a:solidFill>
@@ -24059,9 +24059,9 @@
                 <a:ea typeface="Calibri" pitchFamily="34" charset="-122"/>
                 <a:cs typeface="Calibri" pitchFamily="34" charset="-120"/>
               </a:rPr>
-              <a:t>Tong hop ket qua</a:t>
-            </a:r>
-            <a:endParaRPr lang="en-US" sz="800" dirty="0"/>
+              <a:t>Tổng hợp kết quả</a:t>
+            </a:r>
+            <a:endParaRPr lang="en-US" sz="700" dirty="0"/>
           </a:p>
         </p:txBody>
       </p:sp>
@@ -24182,8 +24182,8 @@
         </p:nvSpPr>
         <p:spPr>
           <a:xfrm>
-            <a:off x="2514600" y="3136392"/>
-            <a:ext cx="1097280" cy="365760"/>
+            <a:off x="2487168" y="3136392"/>
+            <a:ext cx="1152144" cy="384048"/>
           </a:xfrm>
           <a:prstGeom prst="rect">
             <a:avLst/>
@@ -24199,7 +24199,7 @@
               <a:buNone/>
             </a:pPr>
             <a:r>
-              <a:rPr lang="en-US" sz="800" dirty="0">
+              <a:rPr lang="en-US" sz="700" dirty="0">
                 <a:solidFill>
                   <a:srgbClr val="6B7A8D"/>
                 </a:solidFill>
@@ -24209,7 +24209,7 @@
               </a:rPr>
               <a:t>Format response</a:t>
             </a:r>
-            <a:endParaRPr lang="en-US" sz="800" dirty="0"/>
+            <a:endParaRPr lang="en-US" sz="700" dirty="0"/>
           </a:p>
         </p:txBody>
       </p:sp>
@@ -24330,8 +24330,8 @@
         </p:nvSpPr>
         <p:spPr>
           <a:xfrm>
-            <a:off x="3657600" y="3136392"/>
-            <a:ext cx="1097280" cy="365760"/>
+            <a:off x="3630168" y="3136392"/>
+            <a:ext cx="1152144" cy="384048"/>
           </a:xfrm>
           <a:prstGeom prst="rect">
             <a:avLst/>
@@ -24347,7 +24347,7 @@
               <a:buNone/>
             </a:pPr>
             <a:r>
-              <a:rPr lang="en-US" sz="800" dirty="0">
+              <a:rPr lang="en-US" sz="700" dirty="0">
                 <a:solidFill>
                   <a:srgbClr val="6B7A8D"/>
                 </a:solidFill>
@@ -24357,7 +24357,7 @@
               </a:rPr>
               <a:t>Streaming response</a:t>
             </a:r>
-            <a:endParaRPr lang="en-US" sz="800" dirty="0"/>
+            <a:endParaRPr lang="en-US" sz="700" dirty="0"/>
           </a:p>
         </p:txBody>
       </p:sp>
@@ -24478,8 +24478,8 @@
         </p:nvSpPr>
         <p:spPr>
           <a:xfrm>
-            <a:off x="4800600" y="3136392"/>
-            <a:ext cx="1097280" cy="365760"/>
+            <a:off x="4773168" y="3136392"/>
+            <a:ext cx="1152144" cy="384048"/>
           </a:xfrm>
           <a:prstGeom prst="rect">
             <a:avLst/>
@@ -24495,7 +24495,7 @@
               <a:buNone/>
             </a:pPr>
             <a:r>
-              <a:rPr lang="en-US" sz="800" dirty="0">
+              <a:rPr lang="en-US" sz="700" dirty="0">
                 <a:solidFill>
                   <a:srgbClr val="6B7A8D"/>
                 </a:solidFill>
@@ -24505,7 +24505,7 @@
               </a:rPr>
               <a:t>Format Telegram message</a:t>
             </a:r>
-            <a:endParaRPr lang="en-US" sz="800" dirty="0"/>
+            <a:endParaRPr lang="en-US" sz="700" dirty="0"/>
           </a:p>
         </p:txBody>
       </p:sp>
@@ -24590,8 +24590,8 @@
         </p:nvSpPr>
         <p:spPr>
           <a:xfrm>
-            <a:off x="5943600" y="3136392"/>
-            <a:ext cx="1097280" cy="365760"/>
+            <a:off x="5916168" y="3136392"/>
+            <a:ext cx="1152144" cy="384048"/>
           </a:xfrm>
           <a:prstGeom prst="rect">
             <a:avLst/>
@@ -24607,7 +24607,7 @@
               <a:buNone/>
             </a:pPr>
             <a:r>
-              <a:rPr lang="en-US" sz="800" dirty="0">
+              <a:rPr lang="en-US" sz="700" dirty="0">
                 <a:solidFill>
                   <a:srgbClr val="6B7A8D"/>
                 </a:solidFill>
@@ -24615,9 +24615,9 @@
                 <a:ea typeface="Calibri" pitchFamily="34" charset="-122"/>
                 <a:cs typeface="Calibri" pitchFamily="34" charset="-120"/>
               </a:rPr>
-              <a:t>"28 do C, nang, it may"</a:t>
-            </a:r>
-            <a:endParaRPr lang="en-US" sz="800" dirty="0"/>
+              <a:t>"28 độ C, nắng, ít mây"</a:t>
+            </a:r>
+            <a:endParaRPr lang="en-US" sz="700" dirty="0"/>
           </a:p>
         </p:txBody>
       </p:sp>
@@ -24656,7 +24656,7 @@
         </p:nvSpPr>
         <p:spPr>
           <a:xfrm>
-            <a:off x="640080" y="3767328"/>
+            <a:off x="502920" y="3767328"/>
             <a:ext cx="73152" cy="73152"/>
           </a:xfrm>
           <a:prstGeom prst="rect">
@@ -24681,8 +24681,8 @@
         </p:nvSpPr>
         <p:spPr>
           <a:xfrm>
-            <a:off x="777240" y="3703320"/>
-            <a:ext cx="2011680" cy="502920"/>
+            <a:off x="621792" y="3703320"/>
+            <a:ext cx="1920240" cy="502920"/>
           </a:xfrm>
           <a:prstGeom prst="rect">
             <a:avLst/>
@@ -24698,7 +24698,7 @@
               <a:buNone/>
             </a:pPr>
             <a:r>
-              <a:rPr lang="en-US" sz="1000" dirty="0">
+              <a:rPr lang="en-US" sz="900" dirty="0">
                 <a:solidFill>
                   <a:srgbClr val="1E2761"/>
                 </a:solidFill>
@@ -24706,9 +24706,9 @@
                 <a:ea typeface="Calibri" pitchFamily="34" charset="-122"/>
                 <a:cs typeface="Calibri" pitchFamily="34" charset="-120"/>
               </a:rPr>
-              <a:t>Toan bo luong xu ly: ~800ms</a:t>
-            </a:r>
-            <a:endParaRPr lang="en-US" sz="1000" dirty="0"/>
+              <a:t>Toàn bộ luồng xử lý: ~800ms</a:t>
+            </a:r>
+            <a:endParaRPr lang="en-US" sz="900" dirty="0"/>
           </a:p>
         </p:txBody>
       </p:sp>
@@ -24720,7 +24720,7 @@
         </p:nvSpPr>
         <p:spPr>
           <a:xfrm>
-            <a:off x="2788920" y="3767328"/>
+            <a:off x="2606040" y="3767328"/>
             <a:ext cx="73152" cy="73152"/>
           </a:xfrm>
           <a:prstGeom prst="rect">
@@ -24745,8 +24745,8 @@
         </p:nvSpPr>
         <p:spPr>
           <a:xfrm>
-            <a:off x="2926080" y="3703320"/>
-            <a:ext cx="2011680" cy="502920"/>
+            <a:off x="2724912" y="3703320"/>
+            <a:ext cx="1920240" cy="502920"/>
           </a:xfrm>
           <a:prstGeom prst="rect">
             <a:avLst/>
@@ -24762,7 +24762,7 @@
               <a:buNone/>
             </a:pPr>
             <a:r>
-              <a:rPr lang="en-US" sz="1000" dirty="0">
+              <a:rPr lang="en-US" sz="900" dirty="0">
                 <a:solidFill>
                   <a:srgbClr val="1E2761"/>
                 </a:solidFill>
@@ -24770,9 +24770,9 @@
                 <a:ea typeface="Calibri" pitchFamily="34" charset="-122"/>
                 <a:cs typeface="Calibri" pitchFamily="34" charset="-120"/>
               </a:rPr>
-              <a:t>Approval: KHONG (weather la read-only)</a:t>
-            </a:r>
-            <a:endParaRPr lang="en-US" sz="1000" dirty="0"/>
+              <a:t>Approval: KHÔNG (weather là read-only)</a:t>
+            </a:r>
+            <a:endParaRPr lang="en-US" sz="900" dirty="0"/>
           </a:p>
         </p:txBody>
       </p:sp>
@@ -24784,7 +24784,7 @@
         </p:nvSpPr>
         <p:spPr>
           <a:xfrm>
-            <a:off x="4937760" y="3767328"/>
+            <a:off x="4709160" y="3767328"/>
             <a:ext cx="73152" cy="73152"/>
           </a:xfrm>
           <a:prstGeom prst="rect">
@@ -24809,8 +24809,8 @@
         </p:nvSpPr>
         <p:spPr>
           <a:xfrm>
-            <a:off x="5074920" y="3703320"/>
-            <a:ext cx="2011680" cy="502920"/>
+            <a:off x="4828032" y="3703320"/>
+            <a:ext cx="1920240" cy="502920"/>
           </a:xfrm>
           <a:prstGeom prst="rect">
             <a:avLst/>
@@ -24826,7 +24826,7 @@
               <a:buNone/>
             </a:pPr>
             <a:r>
-              <a:rPr lang="en-US" sz="1000" dirty="0">
+              <a:rPr lang="en-US" sz="900" dirty="0">
                 <a:solidFill>
                   <a:srgbClr val="1E2761"/>
                 </a:solidFill>
@@ -24834,9 +24834,9 @@
                 <a:ea typeface="Calibri" pitchFamily="34" charset="-122"/>
                 <a:cs typeface="Calibri" pitchFamily="34" charset="-120"/>
               </a:rPr>
-              <a:t>Context: 8,432 tokens (lich su + memory)</a:t>
-            </a:r>
-            <a:endParaRPr lang="en-US" sz="1000" dirty="0"/>
+              <a:t>Context: 8,432 tokens (lịch sử + memory)</a:t>
+            </a:r>
+            <a:endParaRPr lang="en-US" sz="900" dirty="0"/>
           </a:p>
         </p:txBody>
       </p:sp>
@@ -24848,7 +24848,7 @@
         </p:nvSpPr>
         <p:spPr>
           <a:xfrm>
-            <a:off x="7086600" y="3767328"/>
+            <a:off x="6812280" y="3767328"/>
             <a:ext cx="73152" cy="73152"/>
           </a:xfrm>
           <a:prstGeom prst="rect">
@@ -24873,8 +24873,8 @@
         </p:nvSpPr>
         <p:spPr>
           <a:xfrm>
-            <a:off x="7223760" y="3703320"/>
-            <a:ext cx="2011680" cy="502920"/>
+            <a:off x="6931152" y="3703320"/>
+            <a:ext cx="1920240" cy="502920"/>
           </a:xfrm>
           <a:prstGeom prst="rect">
             <a:avLst/>
@@ -24890,7 +24890,7 @@
               <a:buNone/>
             </a:pPr>
             <a:r>
-              <a:rPr lang="en-US" sz="1000" dirty="0">
+              <a:rPr lang="en-US" sz="900" dirty="0">
                 <a:solidFill>
                   <a:srgbClr val="1E2761"/>
                 </a:solidFill>
@@ -24898,9 +24898,9 @@
                 <a:ea typeface="Calibri" pitchFamily="34" charset="-122"/>
                 <a:cs typeface="Calibri" pitchFamily="34" charset="-120"/>
               </a:rPr>
-              <a:t>Streaming: user thay response theo tung chu</a:t>
-            </a:r>
-            <a:endParaRPr lang="en-US" sz="1000" dirty="0"/>
+              <a:t>Streaming: user thấy response theo từng chữ</a:t>
+            </a:r>
+            <a:endParaRPr lang="en-US" sz="900" dirty="0"/>
           </a:p>
         </p:txBody>
       </p:sp>
@@ -24969,8 +24969,8 @@
         </p:nvSpPr>
         <p:spPr>
           <a:xfrm>
-            <a:off x="7315200" y="-457200"/>
-            <a:ext cx="2560320" cy="2560320"/>
+            <a:off x="8412480" y="-1463040"/>
+            <a:ext cx="1645920" cy="1645920"/>
           </a:xfrm>
           <a:prstGeom prst="ellipse">
             <a:avLst/>
@@ -25026,7 +25026,7 @@
                 <a:ea typeface="Arial Black" pitchFamily="34" charset="-122"/>
                 <a:cs typeface="Arial Black" pitchFamily="34" charset="-120"/>
               </a:rPr>
-              <a:t>Ket Luan</a:t>
+              <a:t>Kết Luận</a:t>
             </a:r>
             <a:endParaRPr lang="en-US" sz="3600" dirty="0"/>
           </a:p>
@@ -25124,7 +25124,7 @@
                 <a:ea typeface="Calibri" pitchFamily="34" charset="-122"/>
                 <a:cs typeface="Calibri" pitchFamily="34" charset="-120"/>
               </a:rPr>
-              <a:t>AI Gateway tu chu — chay tren may ban, 22+ kenh, 30+ LLMs</a:t>
+              <a:t>AI Gateway tự chủ — chạy trên máy bạn, 22+ kênh, 30+ LLMs</a:t>
             </a:r>
             <a:endParaRPr lang="en-US" sz="1300" dirty="0"/>
           </a:p>
@@ -25222,7 +25222,7 @@
                 <a:ea typeface="Calibri" pitchFamily="34" charset="-122"/>
                 <a:cs typeface="Calibri" pitchFamily="34" charset="-120"/>
               </a:rPr>
-              <a:t>Cong cu cho power users — cron, browser control, shell, multi-agent</a:t>
+              <a:t>Công cụ cho power users — cron, browser control, shell, multi-agent</a:t>
             </a:r>
             <a:endParaRPr lang="en-US" sz="1300" dirty="0"/>
           </a:p>
@@ -25320,7 +25320,7 @@
                 <a:ea typeface="Calibri" pitchFamily="34" charset="-122"/>
                 <a:cs typeface="Calibri" pitchFamily="34" charset="-120"/>
               </a:rPr>
-              <a:t>Privacy-first — data khong roi may, MIT license, khong vendor lock-in</a:t>
+              <a:t>Privacy-first — data không rời máy, MIT license, không vendor lock-in</a:t>
             </a:r>
             <a:endParaRPr lang="en-US" sz="1300" dirty="0"/>
           </a:p>
@@ -25413,7 +25413,7 @@
                 <a:ea typeface="Calibri" pitchFamily="34" charset="-122"/>
                 <a:cs typeface="Calibri" pitchFamily="34" charset="-120"/>
               </a:rPr>
-              <a:t>Dung khi</a:t>
+              <a:t>Dùng khi</a:t>
             </a:r>
             <a:endParaRPr lang="en-US" sz="1200" dirty="0"/>
           </a:p>
@@ -25491,7 +25491,7 @@
                 <a:ea typeface="Calibri" pitchFamily="34" charset="-122"/>
                 <a:cs typeface="Calibri" pitchFamily="34" charset="-120"/>
               </a:rPr>
-              <a:t>+ Can su dung Zalo</a:t>
+              <a:t>+ Cần sử dụng Zalo</a:t>
             </a:r>
             <a:endParaRPr lang="en-US" sz="1000" dirty="0"/>
           </a:p>
@@ -25530,7 +25530,7 @@
                 <a:ea typeface="Calibri" pitchFamily="34" charset="-122"/>
                 <a:cs typeface="Calibri" pitchFamily="34" charset="-120"/>
               </a:rPr>
-              <a:t>+ Can privacy cao</a:t>
+              <a:t>+ Cần privacy cao</a:t>
             </a:r>
             <a:endParaRPr lang="en-US" sz="1000" dirty="0"/>
           </a:p>
@@ -25569,7 +25569,7 @@
                 <a:ea typeface="Calibri" pitchFamily="34" charset="-122"/>
                 <a:cs typeface="Calibri" pitchFamily="34" charset="-120"/>
               </a:rPr>
-              <a:t>+ Muon offline AI (Ollama)</a:t>
+              <a:t>+ Muốn offline AI (Ollama)</a:t>
             </a:r>
             <a:endParaRPr lang="en-US" sz="1000" dirty="0"/>
           </a:p>
@@ -25608,7 +25608,7 @@
                 <a:ea typeface="Calibri" pitchFamily="34" charset="-122"/>
                 <a:cs typeface="Calibri" pitchFamily="34" charset="-120"/>
               </a:rPr>
-              <a:t>+ Thich tu dong hoa</a:t>
+              <a:t>+ Thích tự động hóa</a:t>
             </a:r>
             <a:endParaRPr lang="en-US" sz="1000" dirty="0"/>
           </a:p>
@@ -25701,7 +25701,7 @@
                 <a:ea typeface="Calibri" pitchFamily="34" charset="-122"/>
                 <a:cs typeface="Calibri" pitchFamily="34" charset="-120"/>
               </a:rPr>
-              <a:t>Khong dung khi</a:t>
+              <a:t>Không dùng khi</a:t>
             </a:r>
             <a:endParaRPr lang="en-US" sz="1200" dirty="0"/>
           </a:p>
@@ -25740,7 +25740,7 @@
                 <a:ea typeface="Calibri" pitchFamily="34" charset="-122"/>
                 <a:cs typeface="Calibri" pitchFamily="34" charset="-120"/>
               </a:rPr>
-              <a:t>- Muon dung ngay (setup ~30 phut)</a:t>
+              <a:t>- Muốn dùng ngay (setup ~30 phút)</a:t>
             </a:r>
             <a:endParaRPr lang="en-US" sz="1000" dirty="0"/>
           </a:p>
@@ -25779,7 +25779,7 @@
                 <a:ea typeface="Calibri" pitchFamily="34" charset="-122"/>
                 <a:cs typeface="Calibri" pitchFamily="34" charset="-120"/>
               </a:rPr>
-              <a:t>- Khong quen terminal</a:t>
+              <a:t>- Không quen terminal</a:t>
             </a:r>
             <a:endParaRPr lang="en-US" sz="1000" dirty="0"/>
           </a:p>
@@ -25818,7 +25818,7 @@
                 <a:ea typeface="Calibri" pitchFamily="34" charset="-122"/>
                 <a:cs typeface="Calibri" pitchFamily="34" charset="-120"/>
               </a:rPr>
-              <a:t>- Chi can chat don gian</a:t>
+              <a:t>- Chỉ cần chat đơn giản</a:t>
             </a:r>
             <a:endParaRPr lang="en-US" sz="1000" dirty="0"/>
           </a:p>
@@ -25857,7 +25857,7 @@
                 <a:ea typeface="Calibri" pitchFamily="34" charset="-122"/>
                 <a:cs typeface="Calibri" pitchFamily="34" charset="-120"/>
               </a:rPr>
-              <a:t>- Khong co server/VPS</a:t>
+              <a:t>- Không có server/VPS</a:t>
             </a:r>
             <a:endParaRPr lang="en-US" sz="1000" dirty="0"/>
           </a:p>
